--- a/08. Otimização e Simulação_Eder/Otimização da seleção e tomada de decisão_FIT796.pptx
+++ b/08. Otimização e Simulação_Eder/Otimização da seleção e tomada de decisão_FIT796.pptx
@@ -151,12 +151,33 @@
 </p:presentation>
 </file>
 
-<file path=ppt/revisionInfo.xml><?xml version="1.0" encoding="utf-8"?>
-<p1510:revInfo xmlns:a="http://schemas.openxmlformats.org/drawingml/2006/main" xmlns:r="http://schemas.openxmlformats.org/officeDocument/2006/relationships" xmlns:p1510="http://schemas.microsoft.com/office/powerpoint/2015/10/main">
-  <p1510:revLst>
-    <p1510:client id="{E45A2DEC-2261-48AF-B4A8-7B10B1CC645D}" v="1" dt="2026-10-27T15:45:50.880"/>
-  </p1510:revLst>
-</p1510:revInfo>
+<file path=ppt/changesInfos/changesInfo1.xml><?xml version="1.0" encoding="utf-8"?>
+<pc:chgInfo xmlns:a="http://schemas.openxmlformats.org/drawingml/2006/main" xmlns:r="http://schemas.openxmlformats.org/officeDocument/2006/relationships" xmlns:ac="http://schemas.microsoft.com/office/drawing/2013/main/command" xmlns:pc="http://schemas.microsoft.com/office/powerpoint/2013/main/command">
+  <pc:docChgLst>
+    <pc:chgData name="Eder Silva" userId="9b7f41b4-798d-40cf-8f87-8e33ae7a0417" providerId="ADAL" clId="{DFF9E84E-5922-4F26-9EAD-8AB4E668133E}"/>
+    <pc:docChg chg="modSld">
+      <pc:chgData name="Eder Silva" userId="9b7f41b4-798d-40cf-8f87-8e33ae7a0417" providerId="ADAL" clId="{DFF9E84E-5922-4F26-9EAD-8AB4E668133E}" dt="2026-10-30T20:27:24.331" v="0" actId="1076"/>
+      <pc:docMkLst>
+        <pc:docMk/>
+      </pc:docMkLst>
+      <pc:sldChg chg="modSp mod">
+        <pc:chgData name="Eder Silva" userId="9b7f41b4-798d-40cf-8f87-8e33ae7a0417" providerId="ADAL" clId="{DFF9E84E-5922-4F26-9EAD-8AB4E668133E}" dt="2026-10-30T20:27:24.331" v="0" actId="1076"/>
+        <pc:sldMkLst>
+          <pc:docMk/>
+          <pc:sldMk cId="1647038829" sldId="347"/>
+        </pc:sldMkLst>
+        <pc:spChg chg="mod">
+          <ac:chgData name="Eder Silva" userId="9b7f41b4-798d-40cf-8f87-8e33ae7a0417" providerId="ADAL" clId="{DFF9E84E-5922-4F26-9EAD-8AB4E668133E}" dt="2026-10-30T20:27:24.331" v="0" actId="1076"/>
+          <ac:spMkLst>
+            <pc:docMk/>
+            <pc:sldMk cId="1647038829" sldId="347"/>
+            <ac:spMk id="2" creationId="{00000000-0000-0000-0000-000000000000}"/>
+          </ac:spMkLst>
+        </pc:spChg>
+      </pc:sldChg>
+    </pc:docChg>
+  </pc:docChgLst>
+</pc:chgInfo>
 </file>
 
 <file path=ppt/notesMasters/notesMaster1.xml><?xml version="1.0" encoding="utf-8"?>
@@ -2875,7 +2896,7 @@
           <a:p>
             <a:fld id="{5BCAD085-E8A6-8845-BD4E-CB4CCA059FC4}" type="datetimeFigureOut">
               <a:rPr lang="en-US" smtClean="0"/>
-              <a:t>10/27/2026</a:t>
+              <a:t>10/30/2026</a:t>
             </a:fld>
             <a:endParaRPr lang="en-US"/>
           </a:p>
@@ -3043,7 +3064,7 @@
           <a:p>
             <a:fld id="{5BCAD085-E8A6-8845-BD4E-CB4CCA059FC4}" type="datetimeFigureOut">
               <a:rPr lang="en-US" smtClean="0"/>
-              <a:t>10/27/2026</a:t>
+              <a:t>10/30/2026</a:t>
             </a:fld>
             <a:endParaRPr lang="en-US"/>
           </a:p>
@@ -3221,7 +3242,7 @@
           <a:p>
             <a:fld id="{5BCAD085-E8A6-8845-BD4E-CB4CCA059FC4}" type="datetimeFigureOut">
               <a:rPr lang="en-US" smtClean="0"/>
-              <a:t>10/27/2026</a:t>
+              <a:t>10/30/2026</a:t>
             </a:fld>
             <a:endParaRPr lang="en-US"/>
           </a:p>
@@ -3389,7 +3410,7 @@
           <a:p>
             <a:fld id="{5BCAD085-E8A6-8845-BD4E-CB4CCA059FC4}" type="datetimeFigureOut">
               <a:rPr lang="en-US" smtClean="0"/>
-              <a:t>10/27/2026</a:t>
+              <a:t>10/30/2026</a:t>
             </a:fld>
             <a:endParaRPr lang="en-US"/>
           </a:p>
@@ -3634,7 +3655,7 @@
           <a:p>
             <a:fld id="{5BCAD085-E8A6-8845-BD4E-CB4CCA059FC4}" type="datetimeFigureOut">
               <a:rPr lang="en-US" smtClean="0"/>
-              <a:t>10/27/2026</a:t>
+              <a:t>10/30/2026</a:t>
             </a:fld>
             <a:endParaRPr lang="en-US"/>
           </a:p>
@@ -3919,7 +3940,7 @@
           <a:p>
             <a:fld id="{5BCAD085-E8A6-8845-BD4E-CB4CCA059FC4}" type="datetimeFigureOut">
               <a:rPr lang="en-US" smtClean="0"/>
-              <a:t>10/27/2026</a:t>
+              <a:t>10/30/2026</a:t>
             </a:fld>
             <a:endParaRPr lang="en-US"/>
           </a:p>
@@ -4338,7 +4359,7 @@
           <a:p>
             <a:fld id="{5BCAD085-E8A6-8845-BD4E-CB4CCA059FC4}" type="datetimeFigureOut">
               <a:rPr lang="en-US" smtClean="0"/>
-              <a:t>10/27/2026</a:t>
+              <a:t>10/30/2026</a:t>
             </a:fld>
             <a:endParaRPr lang="en-US"/>
           </a:p>
@@ -4455,7 +4476,7 @@
           <a:p>
             <a:fld id="{5BCAD085-E8A6-8845-BD4E-CB4CCA059FC4}" type="datetimeFigureOut">
               <a:rPr lang="en-US" smtClean="0"/>
-              <a:t>10/27/2026</a:t>
+              <a:t>10/30/2026</a:t>
             </a:fld>
             <a:endParaRPr lang="en-US"/>
           </a:p>
@@ -4550,7 +4571,7 @@
           <a:p>
             <a:fld id="{5BCAD085-E8A6-8845-BD4E-CB4CCA059FC4}" type="datetimeFigureOut">
               <a:rPr lang="en-US" smtClean="0"/>
-              <a:t>10/27/2026</a:t>
+              <a:t>10/30/2026</a:t>
             </a:fld>
             <a:endParaRPr lang="en-US"/>
           </a:p>
@@ -4825,7 +4846,7 @@
           <a:p>
             <a:fld id="{5BCAD085-E8A6-8845-BD4E-CB4CCA059FC4}" type="datetimeFigureOut">
               <a:rPr lang="en-US" smtClean="0"/>
-              <a:t>10/27/2026</a:t>
+              <a:t>10/30/2026</a:t>
             </a:fld>
             <a:endParaRPr lang="en-US"/>
           </a:p>
@@ -5077,7 +5098,7 @@
           <a:p>
             <a:fld id="{5BCAD085-E8A6-8845-BD4E-CB4CCA059FC4}" type="datetimeFigureOut">
               <a:rPr lang="en-US" smtClean="0"/>
-              <a:t>10/27/2026</a:t>
+              <a:t>10/30/2026</a:t>
             </a:fld>
             <a:endParaRPr lang="en-US"/>
           </a:p>
@@ -5288,7 +5309,7 @@
           <a:p>
             <a:fld id="{5BCAD085-E8A6-8845-BD4E-CB4CCA059FC4}" type="datetimeFigureOut">
               <a:rPr lang="en-US" smtClean="0"/>
-              <a:t>10/27/2026</a:t>
+              <a:t>10/30/2026</a:t>
             </a:fld>
             <a:endParaRPr lang="en-US"/>
           </a:p>
@@ -7147,7 +7168,7 @@
         </p:nvGraphicFramePr>
         <p:xfrm>
           <a:off x="640080" y="1043813"/>
-          <a:ext cx="10909300" cy="1270000"/>
+          <a:ext cx="10909301" cy="2526411"/>
         </p:xfrm>
         <a:graphic>
           <a:graphicData uri="http://schemas.openxmlformats.org/drawingml/2006/table">
@@ -8954,7 +8975,7 @@
         </p:nvSpPr>
         <p:spPr>
           <a:xfrm>
-            <a:off x="1005840" y="2377440"/>
+            <a:off x="1005840" y="2085340"/>
             <a:ext cx="10241280" cy="1446550"/>
           </a:xfrm>
           <a:prstGeom prst="rect">
@@ -8974,15 +8995,33 @@
               </a:lnSpc>
             </a:pPr>
             <a:r>
-              <a:rPr lang="pt-BR" sz="4400" b="1" i="0">
+              <a:rPr lang="pt-BR" sz="4400" b="1" i="0" dirty="0">
                 <a:solidFill>
                   <a:srgbClr val="FFFFFF"/>
                 </a:solidFill>
                 <a:latin typeface="DejaVu Serif"/>
               </a:rPr>
-              <a:t>Longo prazo (AlphaSimR, 10 repetições, 20 ciclos)</a:t>
-            </a:r>
-            <a:endParaRPr sz="4400" b="1" i="0">
+              <a:t>Longo prazo (</a:t>
+            </a:r>
+            <a:r>
+              <a:rPr lang="pt-BR" sz="4400" b="1" i="0" dirty="0" err="1">
+                <a:solidFill>
+                  <a:srgbClr val="FFFFFF"/>
+                </a:solidFill>
+                <a:latin typeface="DejaVu Serif"/>
+              </a:rPr>
+              <a:t>AlphaSimR</a:t>
+            </a:r>
+            <a:r>
+              <a:rPr lang="pt-BR" sz="4400" b="1" i="0" dirty="0">
+                <a:solidFill>
+                  <a:srgbClr val="FFFFFF"/>
+                </a:solidFill>
+                <a:latin typeface="DejaVu Serif"/>
+              </a:rPr>
+              <a:t>, 10 repetições, 20 ciclos)</a:t>
+            </a:r>
+            <a:endParaRPr sz="4400" b="1" i="0" dirty="0">
               <a:solidFill>
                 <a:srgbClr val="FFFFFF"/>
               </a:solidFill>
@@ -9538,7 +9577,7 @@
         </p:nvGraphicFramePr>
         <p:xfrm>
           <a:off x="640080" y="1043813"/>
-          <a:ext cx="10909300" cy="1016000"/>
+          <a:ext cx="10909300" cy="1496695"/>
         </p:xfrm>
         <a:graphic>
           <a:graphicData uri="http://schemas.openxmlformats.org/drawingml/2006/table">
@@ -10634,7 +10673,7 @@
         </p:nvGraphicFramePr>
         <p:xfrm>
           <a:off x="640080" y="1043813"/>
-          <a:ext cx="10909300" cy="1524000"/>
+          <a:ext cx="10909301" cy="1887474"/>
         </p:xfrm>
         <a:graphic>
           <a:graphicData uri="http://schemas.openxmlformats.org/drawingml/2006/table">
@@ -11766,7 +11805,7 @@
         </p:nvGraphicFramePr>
         <p:xfrm>
           <a:off x="640080" y="1043813"/>
-          <a:ext cx="10909300" cy="1016000"/>
+          <a:ext cx="10909300" cy="1496695"/>
         </p:xfrm>
         <a:graphic>
           <a:graphicData uri="http://schemas.openxmlformats.org/drawingml/2006/table">
@@ -15574,7 +15613,7 @@
         </p:nvGraphicFramePr>
         <p:xfrm>
           <a:off x="640080" y="1043813"/>
-          <a:ext cx="10909300" cy="1016000"/>
+          <a:ext cx="10909301" cy="1973453"/>
         </p:xfrm>
         <a:graphic>
           <a:graphicData uri="http://schemas.openxmlformats.org/drawingml/2006/table">
